--- a/2026_Б_ПІ_ПЗПІ-22-1_Зозуля_О_Ю.pptx
+++ b/2026_Б_ПІ_ПЗПІ-22-1_Зозуля_О_Ю.pptx
@@ -8372,7 +8372,15 @@
             </a:pPr>
             <a:r>
               <a:rPr lang="uk" dirty="0"/>
-              <a:t>	10 червня 2025</a:t>
+              <a:t>	</a:t>
+            </a:r>
+            <a:r>
+              <a:rPr lang="uk"/>
+              <a:t>10 липня </a:t>
+            </a:r>
+            <a:r>
+              <a:rPr lang="uk" dirty="0"/>
+              <a:t>2025</a:t>
             </a:r>
             <a:endParaRPr dirty="0"/>
           </a:p>

--- a/2026_Б_ПІ_ПЗПІ-22-1_Зозуля_О_Ю.pptx
+++ b/2026_Б_ПІ_ПЗПІ-22-1_Зозуля_О_Ю.pptx
@@ -8372,15 +8372,11 @@
             </a:pPr>
             <a:r>
               <a:rPr lang="uk" dirty="0"/>
-              <a:t>	</a:t>
+              <a:t>	10 </a:t>
             </a:r>
             <a:r>
               <a:rPr lang="uk"/>
-              <a:t>10 липня </a:t>
-            </a:r>
-            <a:r>
-              <a:rPr lang="uk" dirty="0"/>
-              <a:t>2025</a:t>
+              <a:t>липня 2026</a:t>
             </a:r>
             <a:endParaRPr dirty="0"/>
           </a:p>

--- a/2026_Б_ПІ_ПЗПІ-22-1_Зозуля_О_Ю.pptx
+++ b/2026_Б_ПІ_ПЗПІ-22-1_Зозуля_О_Ю.pptx
@@ -8491,6 +8491,34 @@
           <a:chExt cx="0" cy="0"/>
         </a:xfrm>
       </p:grpSpPr>
+      <p:pic>
+        <p:nvPicPr>
+          <p:cNvPr id="6" name="Рисунок 5">
+            <a:extLst>
+              <a:ext uri="{FF2B5EF4-FFF2-40B4-BE49-F238E27FC236}">
+                <a16:creationId xmlns:a16="http://schemas.microsoft.com/office/drawing/2014/main" id="{88448A10-2209-4041-BA78-F828D665EB2D}"/>
+              </a:ext>
+            </a:extLst>
+          </p:cNvPr>
+          <p:cNvPicPr/>
+          <p:nvPr/>
+        </p:nvPicPr>
+        <p:blipFill>
+          <a:blip r:embed="rId3"/>
+          <a:stretch>
+            <a:fillRect/>
+          </a:stretch>
+        </p:blipFill>
+        <p:spPr>
+          <a:xfrm>
+            <a:off x="1476632" y="364524"/>
+            <a:ext cx="6808575" cy="4625076"/>
+          </a:xfrm>
+          <a:prstGeom prst="rect">
+            <a:avLst/>
+          </a:prstGeom>
+        </p:spPr>
+      </p:pic>
       <p:sp>
         <p:nvSpPr>
           <p:cNvPr id="92" name="Google Shape;92;p17"/>
@@ -8540,7 +8568,7 @@
           <p:nvPr/>
         </p:nvPicPr>
         <p:blipFill>
-          <a:blip r:embed="rId3">
+          <a:blip r:embed="rId4">
             <a:alphaModFix/>
           </a:blip>
           <a:stretch>
@@ -8597,34 +8625,6 @@
           </a:p>
         </p:txBody>
       </p:sp>
-      <p:pic>
-        <p:nvPicPr>
-          <p:cNvPr id="6" name="Рисунок 5">
-            <a:extLst>
-              <a:ext uri="{FF2B5EF4-FFF2-40B4-BE49-F238E27FC236}">
-                <a16:creationId xmlns:a16="http://schemas.microsoft.com/office/drawing/2014/main" id="{88448A10-2209-4041-BA78-F828D665EB2D}"/>
-              </a:ext>
-            </a:extLst>
-          </p:cNvPr>
-          <p:cNvPicPr/>
-          <p:nvPr/>
-        </p:nvPicPr>
-        <p:blipFill>
-          <a:blip r:embed="rId4"/>
-          <a:stretch>
-            <a:fillRect/>
-          </a:stretch>
-        </p:blipFill>
-        <p:spPr>
-          <a:xfrm>
-            <a:off x="1698880" y="634641"/>
-            <a:ext cx="5585429" cy="4073284"/>
-          </a:xfrm>
-          <a:prstGeom prst="rect">
-            <a:avLst/>
-          </a:prstGeom>
-        </p:spPr>
-      </p:pic>
     </p:spTree>
     <p:extLst>
       <p:ext uri="{BB962C8B-B14F-4D97-AF65-F5344CB8AC3E}">
@@ -14127,7 +14127,15 @@
                 <a:ea typeface="Open Sans" panose="020B0606030504020204" pitchFamily="34" charset="0"/>
                 <a:cs typeface="Open Sans" panose="020B0606030504020204" pitchFamily="34" charset="0"/>
               </a:rPr>
-              <a:t>Мета роботи </a:t>
+              <a:t>Мета </a:t>
+            </a:r>
+            <a:r>
+              <a:rPr lang="uk-UA" i="1" dirty="0">
+                <a:latin typeface="Open Sans" panose="020B0606030504020204" pitchFamily="34" charset="0"/>
+                <a:ea typeface="Open Sans" panose="020B0606030504020204" pitchFamily="34" charset="0"/>
+                <a:cs typeface="Open Sans" panose="020B0606030504020204" pitchFamily="34" charset="0"/>
+              </a:rPr>
+              <a:t>комплексної роботи </a:t>
             </a:r>
             <a:r>
               <a:rPr lang="en-US" dirty="0">
@@ -14205,7 +14213,23 @@
                 <a:ea typeface="Open Sans" panose="020B0606030504020204" pitchFamily="34" charset="0"/>
                 <a:cs typeface="Open Sans" panose="020B0606030504020204" pitchFamily="34" charset="0"/>
               </a:rPr>
-              <a:t>Мета даної роботи – </a:t>
+              <a:t>Мета </a:t>
+            </a:r>
+            <a:r>
+              <a:rPr lang="uk-UA" b="1" dirty="0">
+                <a:latin typeface="Open Sans" panose="020B0606030504020204" pitchFamily="34" charset="0"/>
+                <a:ea typeface="Open Sans" panose="020B0606030504020204" pitchFamily="34" charset="0"/>
+                <a:cs typeface="Open Sans" panose="020B0606030504020204" pitchFamily="34" charset="0"/>
+              </a:rPr>
+              <a:t>даної роботи </a:t>
+            </a:r>
+            <a:r>
+              <a:rPr lang="uk-UA" dirty="0">
+                <a:latin typeface="Open Sans" panose="020B0606030504020204" pitchFamily="34" charset="0"/>
+                <a:ea typeface="Open Sans" panose="020B0606030504020204" pitchFamily="34" charset="0"/>
+                <a:cs typeface="Open Sans" panose="020B0606030504020204" pitchFamily="34" charset="0"/>
+              </a:rPr>
+              <a:t>– </a:t>
             </a:r>
             <a:r>
               <a:rPr lang="uk-UA" dirty="0" err="1">
@@ -14250,6 +14274,14 @@
               </a:spcAft>
               <a:buNone/>
             </a:pPr>
+            <a:r>
+              <a:rPr lang="uk-UA" b="1" dirty="0">
+                <a:latin typeface="Open Sans" panose="020B0606030504020204" pitchFamily="34" charset="0"/>
+                <a:ea typeface="Open Sans" panose="020B0606030504020204" pitchFamily="34" charset="0"/>
+                <a:cs typeface="Open Sans" panose="020B0606030504020204" pitchFamily="34" charset="0"/>
+              </a:rPr>
+              <a:t>Актуальність. </a:t>
+            </a:r>
             <a:r>
               <a:rPr lang="uk-UA" dirty="0">
                 <a:latin typeface="Open Sans" panose="020B0606030504020204" pitchFamily="34" charset="0"/>
@@ -14947,7 +14979,7 @@
                 <a:ea typeface="Open Sans" panose="020B0606030504020204" pitchFamily="34" charset="0"/>
                 <a:cs typeface="Open Sans" panose="020B0606030504020204" pitchFamily="34" charset="0"/>
               </a:rPr>
-              <a:t> має перевантажений інтерфейс і складну навігацію, обмежені можливості комунікації між користувачами, відсутню локалізацію під український ринок та нестабільну роботу мобільного застосунку</a:t>
+              <a:t> має перевантажений інтерфейс і складну навігацію, обмежені можливості комунікації між користувачами, відсутню локалізацію під український ринок</a:t>
             </a:r>
             <a:r>
               <a:rPr lang="en-US" dirty="0">
@@ -15113,96 +15145,6 @@
                 <a:cs typeface="Open Sans" panose="020B0606030504020204" pitchFamily="34" charset="0"/>
               </a:rPr>
               <a:t>інтерфейсом</a:t>
-            </a:r>
-            <a:r>
-              <a:rPr lang="ru-RU" dirty="0">
-                <a:effectLst/>
-                <a:latin typeface="Open Sans" panose="020B0606030504020204" pitchFamily="34" charset="0"/>
-                <a:ea typeface="Open Sans" panose="020B0606030504020204" pitchFamily="34" charset="0"/>
-                <a:cs typeface="Open Sans" panose="020B0606030504020204" pitchFamily="34" charset="0"/>
-              </a:rPr>
-              <a:t>, </a:t>
-            </a:r>
-            <a:r>
-              <a:rPr lang="ru-RU" dirty="0" err="1">
-                <a:effectLst/>
-                <a:latin typeface="Open Sans" panose="020B0606030504020204" pitchFamily="34" charset="0"/>
-                <a:ea typeface="Open Sans" panose="020B0606030504020204" pitchFamily="34" charset="0"/>
-                <a:cs typeface="Open Sans" panose="020B0606030504020204" pitchFamily="34" charset="0"/>
-              </a:rPr>
-              <a:t>технічними</a:t>
-            </a:r>
-            <a:r>
-              <a:rPr lang="ru-RU" dirty="0">
-                <a:effectLst/>
-                <a:latin typeface="Open Sans" panose="020B0606030504020204" pitchFamily="34" charset="0"/>
-                <a:ea typeface="Open Sans" panose="020B0606030504020204" pitchFamily="34" charset="0"/>
-                <a:cs typeface="Open Sans" panose="020B0606030504020204" pitchFamily="34" charset="0"/>
-              </a:rPr>
-              <a:t> </a:t>
-            </a:r>
-            <a:r>
-              <a:rPr lang="ru-RU" dirty="0" err="1">
-                <a:effectLst/>
-                <a:latin typeface="Open Sans" panose="020B0606030504020204" pitchFamily="34" charset="0"/>
-                <a:ea typeface="Open Sans" panose="020B0606030504020204" pitchFamily="34" charset="0"/>
-                <a:cs typeface="Open Sans" panose="020B0606030504020204" pitchFamily="34" charset="0"/>
-              </a:rPr>
-              <a:t>помилками</a:t>
-            </a:r>
-            <a:r>
-              <a:rPr lang="ru-RU" dirty="0">
-                <a:effectLst/>
-                <a:latin typeface="Open Sans" panose="020B0606030504020204" pitchFamily="34" charset="0"/>
-                <a:ea typeface="Open Sans" panose="020B0606030504020204" pitchFamily="34" charset="0"/>
-                <a:cs typeface="Open Sans" panose="020B0606030504020204" pitchFamily="34" charset="0"/>
-              </a:rPr>
-              <a:t> та </a:t>
-            </a:r>
-            <a:r>
-              <a:rPr lang="ru-RU" dirty="0" err="1">
-                <a:effectLst/>
-                <a:latin typeface="Open Sans" panose="020B0606030504020204" pitchFamily="34" charset="0"/>
-                <a:ea typeface="Open Sans" panose="020B0606030504020204" pitchFamily="34" charset="0"/>
-                <a:cs typeface="Open Sans" panose="020B0606030504020204" pitchFamily="34" charset="0"/>
-              </a:rPr>
-              <a:t>збоями</a:t>
-            </a:r>
-            <a:r>
-              <a:rPr lang="ru-RU" dirty="0">
-                <a:effectLst/>
-                <a:latin typeface="Open Sans" panose="020B0606030504020204" pitchFamily="34" charset="0"/>
-                <a:ea typeface="Open Sans" panose="020B0606030504020204" pitchFamily="34" charset="0"/>
-                <a:cs typeface="Open Sans" panose="020B0606030504020204" pitchFamily="34" charset="0"/>
-              </a:rPr>
-              <a:t> в </a:t>
-            </a:r>
-            <a:r>
-              <a:rPr lang="ru-RU" dirty="0" err="1">
-                <a:effectLst/>
-                <a:latin typeface="Open Sans" panose="020B0606030504020204" pitchFamily="34" charset="0"/>
-                <a:ea typeface="Open Sans" panose="020B0606030504020204" pitchFamily="34" charset="0"/>
-                <a:cs typeface="Open Sans" panose="020B0606030504020204" pitchFamily="34" charset="0"/>
-              </a:rPr>
-              <a:t>роботі</a:t>
-            </a:r>
-            <a:r>
-              <a:rPr lang="ru-RU" dirty="0">
-                <a:effectLst/>
-                <a:latin typeface="Open Sans" panose="020B0606030504020204" pitchFamily="34" charset="0"/>
-                <a:ea typeface="Open Sans" panose="020B0606030504020204" pitchFamily="34" charset="0"/>
-                <a:cs typeface="Open Sans" panose="020B0606030504020204" pitchFamily="34" charset="0"/>
-              </a:rPr>
-              <a:t> </a:t>
-            </a:r>
-            <a:r>
-              <a:rPr lang="ru-RU" dirty="0" err="1">
-                <a:effectLst/>
-                <a:latin typeface="Open Sans" panose="020B0606030504020204" pitchFamily="34" charset="0"/>
-                <a:ea typeface="Open Sans" panose="020B0606030504020204" pitchFamily="34" charset="0"/>
-                <a:cs typeface="Open Sans" panose="020B0606030504020204" pitchFamily="34" charset="0"/>
-              </a:rPr>
-              <a:t>застосунку</a:t>
             </a:r>
             <a:r>
               <a:rPr lang="ru-RU" dirty="0">
@@ -15550,7 +15492,7 @@
         <p:spPr>
           <a:xfrm>
             <a:off x="311700" y="481914"/>
-            <a:ext cx="8520600" cy="4172636"/>
+            <a:ext cx="8520600" cy="3877586"/>
           </a:xfrm>
           <a:prstGeom prst="rect">
             <a:avLst/>
@@ -15558,7 +15500,7 @@
         </p:spPr>
         <p:txBody>
           <a:bodyPr spcFirstLastPara="1" wrap="square" lIns="91425" tIns="91425" rIns="91425" bIns="91425" anchor="t" anchorCtr="0">
-            <a:normAutofit fontScale="85000" lnSpcReduction="10000"/>
+            <a:normAutofit fontScale="92500" lnSpcReduction="20000"/>
           </a:bodyPr>
           <a:lstStyle/>
           <a:p>
@@ -15575,87 +15517,15 @@
               <a:buNone/>
             </a:pPr>
             <a:r>
-              <a:rPr lang="ru-RU" dirty="0"/>
-              <a:t>Комплексна </a:t>
-            </a:r>
-            <a:r>
-              <a:rPr lang="ru-RU" dirty="0" err="1"/>
-              <a:t>кваліфікаційна</a:t>
-            </a:r>
-            <a:r>
-              <a:rPr lang="ru-RU" dirty="0"/>
-              <a:t> робота </a:t>
-            </a:r>
-            <a:r>
-              <a:rPr lang="ru-RU" dirty="0" err="1"/>
-              <a:t>складається</a:t>
-            </a:r>
-            <a:r>
-              <a:rPr lang="ru-RU" dirty="0"/>
-              <a:t> з </a:t>
-            </a:r>
-            <a:r>
-              <a:rPr lang="ru-RU" dirty="0" err="1"/>
-              <a:t>серверної</a:t>
-            </a:r>
-            <a:r>
-              <a:rPr lang="ru-RU" dirty="0"/>
-              <a:t> </a:t>
-            </a:r>
-            <a:r>
-              <a:rPr lang="ru-RU" dirty="0" err="1"/>
-              <a:t>частини</a:t>
-            </a:r>
-            <a:r>
-              <a:rPr lang="ru-RU" dirty="0"/>
-              <a:t>, </a:t>
-            </a:r>
-            <a:r>
-              <a:rPr lang="ru-RU" dirty="0" err="1"/>
-              <a:t>бази</a:t>
-            </a:r>
-            <a:r>
-              <a:rPr lang="ru-RU" dirty="0"/>
-              <a:t> </a:t>
-            </a:r>
-            <a:r>
-              <a:rPr lang="ru-RU" dirty="0" err="1"/>
-              <a:t>даних</a:t>
-            </a:r>
-            <a:r>
-              <a:rPr lang="ru-RU" dirty="0"/>
-              <a:t>, </a:t>
-            </a:r>
-            <a:r>
-              <a:rPr lang="ru-RU" dirty="0" err="1"/>
-              <a:t>клієнтської</a:t>
-            </a:r>
-            <a:r>
-              <a:rPr lang="ru-RU" dirty="0"/>
-              <a:t> </a:t>
-            </a:r>
-            <a:r>
-              <a:rPr lang="ru-RU" dirty="0" err="1"/>
-              <a:t>частини</a:t>
-            </a:r>
-            <a:r>
-              <a:rPr lang="ru-RU" dirty="0"/>
-              <a:t> та </a:t>
-            </a:r>
-            <a:r>
-              <a:rPr lang="ru-RU" dirty="0" err="1"/>
-              <a:t>мобільного</a:t>
-            </a:r>
-            <a:r>
-              <a:rPr lang="ru-RU" dirty="0"/>
-              <a:t> </a:t>
-            </a:r>
-            <a:r>
-              <a:rPr lang="ru-RU" dirty="0" err="1"/>
-              <a:t>застосунку</a:t>
-            </a:r>
-            <a:r>
-              <a:rPr lang="ru-RU" dirty="0"/>
+              <a:rPr lang="uk-UA" b="1" dirty="0"/>
+              <a:t>Завдання даної роботи: </a:t>
+            </a:r>
+            <a:r>
+              <a:rPr lang="uk-UA" dirty="0"/>
+              <a:t>розробка серверної частини, бази даних та частини функціоналу мобільного застосунку</a:t>
+            </a:r>
+            <a:r>
+              <a:rPr lang="en-US" dirty="0"/>
               <a:t>.</a:t>
             </a:r>
           </a:p>
@@ -15674,9 +15544,20 @@
             </a:pPr>
             <a:r>
               <a:rPr lang="uk-UA" dirty="0"/>
-              <a:t>Очікуваний основний функціонал системи: керування всіма даними (користувачів системи, дітей, гуртків, груп, центрів); перегляд розкладу; заповнення форми заявки на пробне заняття; обмін повідомленнями в чатах; керування матеріалами; ведення обліку відвідуваності.</a:t>
-            </a:r>
-            <a:endParaRPr lang="en-US" dirty="0"/>
+              <a:t>Серверна частина забезпечує: обробку </a:t>
+            </a:r>
+            <a:r>
+              <a:rPr lang="en-US" dirty="0"/>
+              <a:t>HTTP-</a:t>
+            </a:r>
+            <a:r>
+              <a:rPr lang="uk-UA" dirty="0"/>
+              <a:t>запитів, бізнес-логіку, автентифікацію та авторизацію, взаємодію з БД, інтеграцію з зовнішніми сервісами</a:t>
+            </a:r>
+            <a:r>
+              <a:rPr lang="en-US" dirty="0"/>
+              <a:t>.</a:t>
+            </a:r>
           </a:p>
           <a:p>
             <a:pPr marL="0" lvl="0" indent="0" algn="just" rtl="0">
@@ -15693,68 +15574,32 @@
             </a:pPr>
             <a:r>
               <a:rPr lang="uk-UA" dirty="0"/>
-              <a:t>Завдання даної роботи: розробка серверної частини, бази даних та частини функціоналу мобільного застосунку</a:t>
+              <a:t>Частина мобільного застосунку, реалізована в даній роботі: автентифікацію користувачів, перегляд розкладу занять, профіль користувача, </a:t>
             </a:r>
             <a:r>
               <a:rPr lang="en-US" dirty="0"/>
-              <a:t>.</a:t>
+              <a:t>push-</a:t>
+            </a:r>
+            <a:r>
+              <a:rPr lang="uk-UA" dirty="0"/>
+              <a:t>сповіщення про зміни в розкладі.</a:t>
             </a:r>
           </a:p>
           <a:p>
-            <a:pPr marL="0" lvl="0" indent="0" algn="just" rtl="0">
+            <a:pPr marL="0" indent="0" algn="just">
               <a:lnSpc>
                 <a:spcPct val="120000"/>
               </a:lnSpc>
               <a:spcBef>
                 <a:spcPts val="1000"/>
               </a:spcBef>
-              <a:spcAft>
-                <a:spcPts val="0"/>
-              </a:spcAft>
               <a:buNone/>
             </a:pPr>
             <a:r>
               <a:rPr lang="uk-UA" dirty="0"/>
-              <a:t>Серверна частина забезпечує: обробку </a:t>
-            </a:r>
-            <a:r>
-              <a:rPr lang="en-US" dirty="0"/>
-              <a:t>HTTP-</a:t>
-            </a:r>
-            <a:r>
-              <a:rPr lang="uk-UA" dirty="0"/>
-              <a:t>запитів, бізнес-логіку, автентифікацію та авторизацію, взаємодію з БД, інтеграцію з зовнішніми сервісами</a:t>
-            </a:r>
-            <a:r>
-              <a:rPr lang="en-US" dirty="0"/>
-              <a:t>.</a:t>
-            </a:r>
-          </a:p>
-          <a:p>
-            <a:pPr marL="0" lvl="0" indent="0" algn="just" rtl="0">
-              <a:lnSpc>
-                <a:spcPct val="120000"/>
-              </a:lnSpc>
-              <a:spcBef>
-                <a:spcPts val="1000"/>
-              </a:spcBef>
-              <a:spcAft>
-                <a:spcPts val="0"/>
-              </a:spcAft>
-              <a:buNone/>
-            </a:pPr>
-            <a:r>
-              <a:rPr lang="uk-UA" dirty="0"/>
-              <a:t>Мобільний застосунок реалізує: автентифікацію користувачів, перегляд розкладу занять, профіль користувача, </a:t>
-            </a:r>
-            <a:r>
-              <a:rPr lang="en-US" dirty="0"/>
-              <a:t>push-</a:t>
-            </a:r>
-            <a:r>
-              <a:rPr lang="uk-UA" dirty="0"/>
-              <a:t>сповіщення про зміни в розкладі.</a:t>
-            </a:r>
+              <a:t>Очікуваний основний функціонал системи: керування всіма даними (користувачів системи, дітей, гуртків, груп, центрів); перегляд розкладу; заповнення форми заявки на пробне заняття; обмін повідомленнями в чатах; керування матеріалами; ведення обліку відвідуваності.</a:t>
+            </a:r>
+            <a:endParaRPr lang="en-US" dirty="0"/>
           </a:p>
         </p:txBody>
       </p:sp>
